--- a/Clase_7/PPT/Clase07_Extra_Modelos_Locales_y_Frontera.pptx
+++ b/Clase_7/PPT/Clase07_Extra_Modelos_Locales_y_Frontera.pptx
@@ -472,6 +472,116 @@
 </inkml:ink>
 </file>
 
+<file path=ppt/ink/ink5.xml><?xml version="1.0" encoding="utf-8"?>
+<inkml:ink xmlns:inkml="http://www.w3.org/2003/InkML">
+  <inkml:definitions>
+    <inkml:context xml:id="ctx0">
+      <inkml:inkSource xml:id="inkSrc0">
+        <inkml:traceFormat>
+          <inkml:channel name="X" type="integer" min="-2.14748E9" max="2.14748E9" units="cm"/>
+          <inkml:channel name="Y" type="integer" min="-2.14748E9" max="2.14748E9" units="cm"/>
+          <inkml:channel name="F" type="integer" max="32767" units="dev"/>
+        </inkml:traceFormat>
+        <inkml:channelProperties>
+          <inkml:channelProperty channel="X" name="resolution" value="1000" units="1/cm"/>
+          <inkml:channelProperty channel="Y" name="resolution" value="1000" units="1/cm"/>
+          <inkml:channelProperty channel="F" name="resolution" value="0" units="1/dev"/>
+        </inkml:channelProperties>
+      </inkml:inkSource>
+      <inkml:timestamp xml:id="ts0" timeString="2026-10-15T01:41:41.151"/>
+    </inkml:context>
+    <inkml:brush xml:id="br0">
+      <inkml:brushProperty name="width" value="0.05292" units="cm"/>
+      <inkml:brushProperty name="height" value="0.05292" units="cm"/>
+      <inkml:brushProperty name="color" value="#FF0000"/>
+    </inkml:brush>
+  </inkml:definitions>
+  <inkml:trace contextRef="#ctx0" brushRef="#br0">25606 13817 24575,'12'-6'0,"-1"0"0,15-6 0,-12 5 0,10-4 0,-1-1 0,-7 4-1093,6-4 1,5-1 0,-6 1-2185,-3 2 2457,3-1 1,9-5 0,0 0 0,-7 4 1504,6-2-685,-5 1 0,6-3 0,1-1 0,-7 4 0,9 0 0,-6-2 0,3-3 0,-5 4 716,-2 7-716,0-7 0,1 0 0,-2 5 0,1-3 0,-6 4 0,-11 5 0</inkml:trace>
+</inkml:ink>
+</file>
+
+<file path=ppt/ink/ink6.xml><?xml version="1.0" encoding="utf-8"?>
+<inkml:ink xmlns:inkml="http://www.w3.org/2003/InkML">
+  <inkml:definitions>
+    <inkml:context xml:id="ctx0">
+      <inkml:inkSource xml:id="inkSrc0">
+        <inkml:traceFormat>
+          <inkml:channel name="X" type="integer" min="-2.14748E9" max="2.14748E9" units="cm"/>
+          <inkml:channel name="Y" type="integer" min="-2.14748E9" max="2.14748E9" units="cm"/>
+          <inkml:channel name="F" type="integer" max="32767" units="dev"/>
+        </inkml:traceFormat>
+        <inkml:channelProperties>
+          <inkml:channelProperty channel="X" name="resolution" value="1000" units="1/cm"/>
+          <inkml:channelProperty channel="Y" name="resolution" value="1000" units="1/cm"/>
+          <inkml:channelProperty channel="F" name="resolution" value="0" units="1/dev"/>
+        </inkml:channelProperties>
+      </inkml:inkSource>
+      <inkml:timestamp xml:id="ts0" timeString="2026-10-15T01:41:52.982"/>
+    </inkml:context>
+    <inkml:brush xml:id="br0">
+      <inkml:brushProperty name="width" value="0.05292" units="cm"/>
+      <inkml:brushProperty name="height" value="0.05292" units="cm"/>
+      <inkml:brushProperty name="color" value="#FF0000"/>
+    </inkml:brush>
+  </inkml:definitions>
+  <inkml:trace contextRef="#ctx0" brushRef="#br0">4388 5225 24575,'-2'7'0,"1"0"0,-5 7 0,3-5-1639,-4 12 1,-1 1-1639,5-9 1638,-4 6 1,0 1 2966,1-2-1328,-1 2 0,0 2 640,-1 4-640,2-7 0,1 1 0,-3 9 0,-1-1 0,-2 3-1093,1-1 1,-2 5 0,2-6 189,0-4 903,0 0 0,-1 1 0,0 4 0,3-11 0,-5 9 0,7-14 0,-3 5 0,-2 2 0,3-4 0,-1 2 361,-2 3 0,0 1-361,-1 4 0,1-4 3276,2-5-2646,-4 14 1,0 0-631,6-13 1638,-2 4 0,0 1 1638,1-4-3044,1-3-232,-3 0 0,6 1 0,-2-4-3277,3 13 0,3-21 3047,0 16 230,-1-15 0,0 3 0,0-7 0</inkml:trace>
+  <inkml:trace contextRef="#ctx0" brushRef="#br0" timeOffset="602">3794 6096 24575,'13'35'0,"-5"-11"0,2-2 0,1 1 0,-1 1 0,-1-4 0,0 0 0,0 3 0,2 1 0,0-1 0,-4-7 0,5 11 0,0-2 0,-5-14 0,2 9 0,0 0 0,-2-11 0,5 19 0,-6-19 0,2 8 0,-11-24-820,-1-2 1,-2-6 0,3 7 0</inkml:trace>
+  <inkml:trace contextRef="#ctx0" brushRef="#br0" timeOffset="1321">3889 6174 24575,'14'2'0,"-5"-2"0,15 2 0,-17-2 0,20 1 0,1 6 0,-4-4-1639,0 4 1,-2-1-1639,-11-5 2524,11 5 1,-1-1 752,-12-4 0,20 6 0,-23-6 0,2 0 0,-5 0 3276,-1 2-400,1 5-969,-3 9-1907,1-5 0,-1 11 0,-1 2 0,-1-11 0,-2 6 0,0-1 0,-1-11 0,-9 24 0,9-24 0,-12 16 0,5-7 0,0 0 0,-1 0 0,11-13 0,-10 3 0,1-8 0,2 2 0,0-4 0</inkml:trace>
+  <inkml:trace contextRef="#ctx0" brushRef="#br0" timeOffset="2036">3900 6281 24575,'6'29'0,"0"-9"0,-1-4 0,-3-8 0,6 11 0,-4-14 0,-1 3 0,0-7 0,2-4 0,8-14 0,0 3 0,1 1 0,6-8 0,-4 8 0,-2 2 0,-6 6 0,5-2 0,-10 5 0,0 2 0,6 21 0,-6-6 0,2 5 0,0 2 0,-3 9 0,2-6 0,-4-4 0,2-11 0,-2-4 0,0 4 0,2-23 0,-1 10 0,2-12 0</inkml:trace>
+  <inkml:trace contextRef="#ctx0" brushRef="#br0" timeOffset="3570">14348 5351 24575,'-1'5'0,"-19"22"-1639,6-10 1,0 0-1,2-2 1,-2 2-1,-9 13 1,2-2-186,10-14 1310,-3 6 1,-4 5-1,3-5 514,3-3 0,-5 8 0,-5 7 0,5-7-605,6-7 605,-2 2 0,-4 5 0,3-3 0,3-5 0,2-1 0,-1-1 0,-1 1 0,-2 5 0,-2 3 0,3-5 0,-1 1 0,0 2 0,-2 4 669,1 0 1,1 1-670,0-2 0,0 1 1638,-2 2 0,0 0-1290,0 1 0,3-5 738,6-15-1086,-4 12 0,0 1 0,7-14 3276,-9 23-75,2-10-3201,2 1 0,-4-1 0,1-1 0,5-4 0,-6 5 0,-4 5 0,3-4 0,1 2 0,-8 8 0,0-1 927,9-14-927,-9 14 0,14-22 0,-1 4 0,6-10 0</inkml:trace>
+  <inkml:trace contextRef="#ctx0" brushRef="#br0" timeOffset="3987">13482 6337 24575,'15'4'0,"15"3"-3277,-15-2 2259,15 1 394,-9-1 624,-5-1 0,16 3 0,-20-4 276,9 5 1,-16-7 0,3 5-1</inkml:trace>
+  <inkml:trace contextRef="#ctx0" brushRef="#br0" timeOffset="4789">13389 6374 24575,'0'11'0,"3"19"0,-3-19 0,3 12 0,1 1 0,0-11-1639,2 10 1,0 0-1639,-2-13 2620,5 9 0,-1 1 657,-5-10 0,12 19 0,-12-22-635,5 7 635,-5-9 0,4 7 0,-2-4 0,7 8 0,-6-9 1029,8 7-1029,-9-9 690,5 0-690,-6-7 0,11-9 0,6-11 0,-4 5 3276,6-11 0,-9-1-3044,-3 10-232,-2-3 0,-1 1 0,-5 12 0,6-15 0,-8 18 0,0 3 0,-4 6 0,-2 2 0,-2 3 0,1-5 0,0 2 0,5-6 0,-1-7 0,1-4 0,-1-1 0,-5 1 0,4 9 0,-3 0 0</inkml:trace>
+  <inkml:trace contextRef="#ctx0" brushRef="#br0" timeOffset="5795">23468 4716 24575,'5'23'0,"0"1"0,-3-2 0,4 5 0,3 7 0,-2-5-1857,1 5 1857,-1-7 0,2 7 0,0 1 0,-1-6-1044,-1-2 0,1 0 1044,0 1 0,2 7 0,1 1 0,-1-2 0,-2-6 0,-1-5 0,0-1 0,1 5 0,2 7 0,0 2 0,0-2 0,-1-7-1639,-1-4 1,-1-2 1107,2 9 0,1 5 0,0-1 531,1 0 0,0 0 0,0-2-898,-1-3 1,0 1 897,0-3 0,0 6 0,2 1 0,-1-1 0,-1-6 0,2 1 0,-1 0 0,1 4 0,2 6 0,-1-1 0,-3-8-1404,3 6 1404,-1 0 0,-1 1 0,-4-11 0,-2-2 1013,2 6-1013,0-5 0,1 4 0,-3-7 3276,-2-5-2567,6 12 1,1-1-710,-5-15 1289,4 7 0,1-1-1289,-3-6 0,5 2 819,-11-9 0,1-4 0,-5-1 0</inkml:trace>
+  <inkml:trace contextRef="#ctx0" brushRef="#br0" timeOffset="6281">23682 6448 24575,'9'-3'0,"-2"1"0,17-6 0,-5 2 0,2-1 0,10-6 0,0-1 0,-7 6 0,0-1 0,4-6 0,-4 1 0,-12 9 0,8-10 0,-15 12 0,1-2 0,3 1-3277,10-7 0,-6 6 3047,9-7-310,-18 11 0,2-4 1,-5 5-1</inkml:trace>
+  <inkml:trace contextRef="#ctx0" brushRef="#br0" timeOffset="7398">23704 6422 24575,'17'11'0,"13"6"0,-8-5 0,-2 1 0,-1-1 0,-5-4-1639,7 7 1,-1 1-1639,-7-9 1638,8 12 1,-2 0-1639,-12-12 3434,10 12 1,1 0-158,-8-10 0,5 5 0,0 0 0,-5-10 3276,0 4-2745,-9-20-531,-3 6 0,1-13 0,1-1 0,1 7 0,1-12 0,1-1 0,1 14-1168,-1-14 1,-1 1 1167,0 15 0,-1-25 0,-2 10 0,-2-1 0,1-1 0,-2 14 0,3 11 3276,-9 11-2015,-6 4-1261,2-2 0,-14 5 0,20-12 3276,-10 4 0,16-9-3044,-1-5-232,6-3 0,-1 2 0,1 3 0,-4 7 0,0 0 0</inkml:trace>
+  <inkml:trace contextRef="#ctx0" brushRef="#br0" timeOffset="37098">8289 9047 24575,'16'-8'0,"2"0"0,8-5 0,-10 6-300,-2 2 0,-12 5 1,-1 0-1</inkml:trace>
+  <inkml:trace contextRef="#ctx0" brushRef="#br0" timeOffset="40165">3992 10360 24575,'17'-6'0,"8"-2"0,8-2 0,-4 0-1639,-9 3 1,0 0 818,4 0 1,5-1 0,1 0 0,-3 0 88,6-3 1,1 1 402,-6 3 0,2-1 0,0 1 1,-3 0-1,8-4 0,-2 0 1,-8 5-1,0-1 0,0 1 1</inkml:trace>
+  <inkml:trace contextRef="#ctx0" brushRef="#br0" timeOffset="41849">5040 11345 24575,'5'-3'0,"5"0"0,-3 1 0,21-5 0,-18 6 0,12-4 0,3 0 0,-1 4 0,0-2 0,6-1 0,-5 1-599,5 2 599,-3-2 0,7 0 0,2-1 0,-6 1-785,-4 0 0,0 0 785,5 0 0,7-1 0,0 0 0,-2 1-1093,1-2 1,-1 0 0,-2 1 162,-8 0 1,-2 1-1,1 0 930,5 0 0,-1-1 0,-1 0-310,3 1 0,-2-1 310,-2 1 0,1 1 0,0-1 0,5 0 0,2 0 0,-4 0 0,3 0 0,-1 0 0,-3 1 0,-1 1 0,-1-1 0,7-1 0,2 0 0,-7 1 0,4-1 0,-2 0 0,-9 2 0,-2-1 0,12-1 0,10 0 0,-9-1 0,-8 2 0,8-1 0,9-1 0,-10 0 0,-12 1 0,10 1 0,8-2 0,-8 2-3277,-13 0 3247,10 0 1,4 0 182,-2 2 0,0 0-153,5 0 0,0 1 0,-2-1 0,2 1 0,-6-1 0,2 1 0,0-1 0,-6 0 0,11 1 0,-3-1 0,7 1 0,-4-1 0,-6 0 0,-4 0 1638,-2 0 0,-1 0-1147,7 0 0,-5 0-491,-11 0 343,8 0 0,3 0-343,-1 0 0,-1-1 0,-4 1 0,2-1-153,7 0 0,4-2 0,-5 1 153,4 1 0,0-1 0,6-1 0,-7 1 330,-8 1-330,4 0 0,9-2 0,0 1 0,-8 1 0,0 0 0,7-1 0,7 0 0,-10 1 0,-15 1 0,16 0 0,2 0 0,-13 0 0,9 0 0,1 0 0,-8 1 0,6 1 0,-1-1 3276,-12 2-2184,9-1 0,8 0 0,-7 0-1002,-8 2-90,12-2 0,8-1 0,-8 0 428,-13 2-428,10-2 0,8-1 0,-6 0 0,-5 1 0,6 0 0,6 0 0,-7 0 0,-5-1 0,8-1 0,8 1 0,-7-1-1239,-5 1 1239,4 0 0,6 1 0,-6 0 0,0 0 0,-4 0 0,5 1 0,-6-1 0,1-1 0,2 1 0,6 1 0,-8-1 0,-5-1 0,1 2 0,7 1 0,-3-1 0,-4 0 0,-1-1-1361,1 1 1,0 0 1360,-2 0 0,0-1 531,-2 1 1,0-1-532,3 1 0,2-1-1093,0 0 1,2 0 0,-2 0-182,-3-1 1,-1 0-366,14 0 1,-4 0 1020,-21 0 796,17 0 1,2 0-179,-14 0 0,10 0 0,2 0 0,7 0 3276,-5-2-2878,-5 2 0,-2 0 2878,-12-1-1870,14 0 1,-1 0 691,-14 1-2098,13-1 0,1 1 0,-10 0-1639,8 0 1,-1 0-1639,-8 0 1638,7-1 1,-1 0 148,-10 1 392,15-1 1,2 0 1097,-12 1-1154,14 0 1,-1-1 1153,-13 1 327,7-1 1,-1 0-328,-11 1 2631,15 0-2631,-19 0 625,3-1 1,-5 1 0,-2-2 0</inkml:trace>
+  <inkml:trace contextRef="#ctx0" brushRef="#br0" timeOffset="45998">12420 8270 24575,'12'3'0,"17"-2"0,1 1-3264,-8-1 3264,12 0 0,3 0 0,-8-1-820,-5 0 1,7 0 0,0 0 0,-3 0-817,-1 0 1,2 0 1635,1 0 0,8 0 0,3 0 0,-4 0 0,-8 0 496,-8 0 1,0 0-497,8 0 0,8 0 0,3 0 0,-2 0 0,-8 0-696,-2-1 1,-1 0 695,1 1 0,7 0 0,1 0 0,-2 0 0,-6-1 0,-3 0 0,-1-1 0,6 1 0,5 1 0,0 0 0,-9-1 0,2-3 0,-3 4 0,7 1 0,0 0 0,-7-1 0,3-3 0,6 3 0,9 2 0,-8-1 0,-8-4 0,4 2 0,11 2 0,0-1 0,-10 0 0,-1 0 0,-2 0 0,10 0 0,4 0 0,-3 0 0,-10 0 0,-11 0 0,1 0 0,7 0 0,10 0 0,2 0 0,-4 0 0,-8 0 0,4 0 0,0 0 0,10 0 0,1 0 0,-9 0 0,-13 0 0,1 0 0,7 0 0,7-1 0,3 1 0,-2 0 0,-7-1 0,-5 1 0,1 0 0,2-1 0,8 0 0,3 1 0,0-1 0,-4 0 0,-9 0 0,-6 1 0,0 0 0,7-1 0,8 1 0,6-1 0,3 1 0,-2-1 0,-4 1 0,-8 0-406,5 0 0,-1 0 406,-7 0 0,4 0 0,3-1 0,3 1 0,1 0 0,-1-1 0,-1 1 0,-4 0 0,3 0 0,-2 0 0,-1 0 0,0 0 0,0 0 0,1-1 0,1 1 0,-1-1 0,1 1 0,1 0 0,-1 0 0,1 0 0,2 0 0,-2 0 0,0 0 0,-3 0-662,3 0 0,-3 0 1,0 0-1,0 0 662,-2 0 0,1 0 0,-1 0 0,2 0-410,6 0 0,3 0 1,-3 0-1,-9 0 410,2 0-55,-2 0 1,5 0 0,-7 0 54,-6 0 0,0 0 0,-1 0 0,-10 0 2480,7-2-2480,-13 2 3276,10-1-2842,4-1-434,-1 2-2040,15-2 2040,-24 2 3276,26-1-2659,-24-1-617,20-2 0,-16 2 0,2-1 0,-3 3 3276,3-2-87,-3 2-3189,16-4 0,-18 2-3277,20-1 733,-24 1 2544,11 2 0,-15-1 0,2-1 0,-2-1 0,1 1 0,-2 1 0</inkml:trace>
+  <inkml:trace contextRef="#ctx0" brushRef="#br0" timeOffset="46448">17213 7830 24575,'2'8'0,"3"13"0,-2-9 0,1 7 0,0 1 0,0-2-1639,1 8 1,0-1-1639,-2-11 1638,2 12 1,1 0 996,-3-14-360,2 8 1,0-2 1001,-3-9 0,6 12 0,-5-12 819,1 2 0,-2-5 0,-2-5 0</inkml:trace>
+  <inkml:trace contextRef="#ctx0" brushRef="#br0" timeOffset="47335">12288 7882 24575,'-4'22'0,"0"4"0,-1-5 0,-1 11 0,5-9 0,-1-2 0,2 2 0,0-17 0,1 7 0,-1-10 0,2 2 0</inkml:trace>
+  <inkml:trace contextRef="#ctx0" brushRef="#br0" timeOffset="47883">12321 7856 24575,'33'-5'0,"-5"1"0,5-1 0,-2 0-1639,-1-1 1,4-1 1218,-8 3 1,4-1-1,5 0 1,1 1-1,1-1 1,1 0 0,-3 0-50,1-1 1,0 1 0,0-1 0,0 0 0,0 1 0,0-1 0,0 1 242,-3 0 1,0 1-1,-1 0 1,1 0 0,0-1-1,1 1 1,2-1 225,-4 0 0,2 0 0,1 0 0,1-1 0,0 1 0,0-1 0,0 1 0,-1-1 0,-1 2 0,-1-1-253,5 1 1,-2 0-1,-1 1 1,0 0-1,-1-1 1,0 1-1,1-1 253,-1 0 0,0-1 0,-1 1 0,1-1 0,0 0 0,1 1 0,2 0-254,-4 1 1,1 0 0,3 1 0,0 0 0,0 0 0,0 0 0,-1 1 0,-2-1-1,-2 1 1,-2-1 253,5 0 0,-4 1 0,-1-1 0,0 1 0,6 0 0,-6 0 0,3 1 0,2-1 0,1 0 0,1 1 0,1 0 0,1-1 0,0 1 0,-1-1 0,0 0-93,-2 0 1,0 0 0,2 0-1,-1 0 1,1 0 0,-1 0-1,0 0 1,0 0 0,0 0 0,-2 0-1,0 0 93,1 0 0,-2 0 0,0 0 0,-1 0 0,-1 0 0,2 0 0,0 0 0,2-1 0,2 1 0,-6 0 0,3 0 0,2 0 0,2 0 0,1 0 0,0-1 0,1 1 0,-1 0 0,0-1 0,-2 1 0,-2 0 0,-1 0 0,-4 0 0,-2 0 0,-4 0 0,8-1 0,-7 1 0,-1 0 0,9 0 0,-8 0 0,5 0 0,3 0 0,4-1 0,2 1 0,1 0 0,1 0 0,1-1 0,-2 1 0,-1 0 0,-2-1 0,-3 1 0,-4 0 0,-5 0 0,10 0 0,-9 0 0,1-1 0,6 0 34,-6 1 0,3 0 0,4-1 0,2 0 1,3 0-1,0 0 0,0 0 0,-1 0 0,-1 0 1,-3 0-1,-3 0 0,-5 0-34,11-1 0,-6 1 0,-2-1 0,3 0 290,0 0 0,4 0 1,-1 0-1,-2 0 1,-7 0-291,4 0 0,-9 0 2951,-11 2-2951,-8 1 3276,-1 2-2139,4-2-318,-4 1 0,2-1 0,-4 2 0</inkml:trace>
+  <inkml:trace contextRef="#ctx0" brushRef="#br0" timeOffset="57892">13551 10450 24575,'35'-2'0,"0"0"0,0 0 0,-6 1 0,3-1 0,0 1 0,-1 0 0,-2 0-1093,1-1 1,-3 1 0,6 0 623,-2 1 1,6-1 0,3 1 0,2 0 0,-1 0 0,-3-1 0,-5 1-352,-2-1 1,-4 0 0,0 1 0,5-1 735,0 1 0,4 0 0,4 0 0,1 0 0,-1 0 0,0 0 0,-5 0 0,-4 0-580,7 0 1,-6 0-1,3 0 664,-3 0 0,2 0 0,1 0 0,0 0 0,-1 0 0,0 0 0,0 0 0,-1 0 0,-1 0-596,0 0 1,0 1 0,0-1 0,-2 1 595,4-1 0,0 0 0,-3 0 281,10 1 1,-11-1 0,-22 0 0,-7 0 0</inkml:trace>
+  <inkml:trace contextRef="#ctx0" brushRef="#br0" timeOffset="60182">16550 11258 24575,'37'0'0,"0"-1"0,0 1 0,-9 0 0,2 0-547,-5-1 1,3 1 0,4 0 0,3 0 0,2-1 0,2 1 311,-9 0 1,3 0 0,2 0 0,2-1 0,2 1 0,1 0 0,1 0 0,0 0 0,-1-1 0,-1 1 0,-1 0 0,-2 0 0,-2 0 0,-3 0-313,10-1 1,-5 1 0,-2 0 0,0 0 0,2 0 0,6 0 426,-12 0 1,4-1-1,3 1 1,1-1-1,3 1 1,0-1-1,1 1 1,0-1 0,0 1-1,-2-1 1,-2 0-1,-2 1 1,-2-1-1,-4 0 1,-4 1 283,11-1 0,-7 0 0,-2 0 0,4-1-164,4 0 0,2-1 0,1 0 0,-1 0 0,-3 1 0,4 0 0,-4 1 0,1-2 0,4-1 0,0-1 0,-9 2 0,-7 1 0,8-3-788,-1 5 0,-24 0 1,9 0-1</inkml:trace>
+  <inkml:trace contextRef="#ctx0" brushRef="#br0" timeOffset="61098">19039 11290 24575,'0'-25'0,"-1"-11"0,0 6 0,0-1 0,0 11 0,0 0 0,0-7 0,-1 3 0,1 10 0,-2 1 0,-1 8 0,-14 26 0,11-15 0,-15 16 0,17-17 0,-1 3 0,1-5 0,4 0 0,-1-3 0</inkml:trace>
+  <inkml:trace contextRef="#ctx0" brushRef="#br0" timeOffset="63045">23611 7851 24575,'2'-18'0,"2"-1"0,0-1 0,-2 6 0,3-8 0,-1-1 0,-3 11 0,3-14 0,2-4 0,-4 8 0,2 1 0,2-10 0,1 1 0,1-5 0,3 9 0,-2 14 0,2-4 0,1 5 0,3-4 0,1 0-820,0-1 1,-6 6 0,-5 5 0</inkml:trace>
+  <inkml:trace contextRef="#ctx0" brushRef="#br0" timeOffset="66480">23454 9267 24575,'31'-2'0,"0"-1"0,5 1 0,-4 0 0,-11 2 0,11 0 0,-1 0 0,-12 0 0,4 0 0,6 0 0,-4-1-984,10 1 984,-6 0 0,7 0 0,-1 0-1093,-4 0 1,-1 0 0,0 0 85,1 0 1,1 0-1,2 0 1007,2-1 0,3 0 0,-1 0 0,-4 0-610,-2 1 0,0-1 610,-4 0 0,6-1 0,0 0 0,-1 0 0,-8 0 0,-5 2 0,-1-1 0,7-1 0,7-1 0,-2 0 0,-8 1 0,-6 1 0,9-2 0,8-1 0,-8 1 451,-11 1-451,14 0 0,2-1 0,-1 1 0,-1 2 0,-7-1 0,-2 1 0,-10 0-681,10 0 1,-1 0 680,-11 0-847,11 0 1,1 0 846,-13 0 0,20-2 0,-23 2 819,4-3 0,-7 3 0,-1-2 0</inkml:trace>
+  <inkml:trace contextRef="#ctx0" brushRef="#br0" timeOffset="75594">26370 1382 24575,'8'30'0,"-3"-10"0,1 4 0,1 2-3277,0 4 3165,-2-10 1,0 3 111,2 3 0,0 3 0,2 4 0,-2-6 0,0 3 0,1 2 0,0 0 0,0 0 0,-1-1-656,1 0 1,-1-2-1,0 1 1,1 1 0,0 2 357,0-2 0,1 4 1,1 1-1,-1 2 1,1-1-1,-1-2 0,-1-3 1,0-4 297,1 9 0,-2-6 0,2 2 0,0-1 0,2 3 0,1 1 0,-2-3 0,0-7 904,-2-4 0,0-2-904,8 11 0,-1-4 0,-5-15 0,3 3 0,-12-13 0,1-2 0</inkml:trace>
+  <inkml:trace contextRef="#ctx0" brushRef="#br0" timeOffset="76381">26141 1848 24575,'-2'-9'0,"5"-5"-3277,6-15 0,-1 12 1638,9-11 1,3 2-1639,-4 13 2861,3-5 1,6-6-1,-3 6 416,1 5-677,5-2 1,7-3 0,-7 5 676,-1 5 0,0 0 0,9-2 0,-1 1 0,-8 3 0,-1 2 0,-1 1 0,8 0 0,-1-1 0,-10 3 0,-7 1 433,20 4 0,-2 3-433,-25-2 2458,23 9-2458,-29-3 0,2 7 0,-1 2 0,-6 6 0,-5 9 0,-2-2 0,0-8 0,-7-2 0,-4 2 0,3-4 3276,3-6-3143,-7 2 0,-6 4 0,6-5 2468,9-7-2601,-11 4 0,8-4 0,22-11 0,11-5 0,1 0 0,10-2 0,-1 1 0,-13 4-1615,13-2 0,-1 2 1615,-19 4-980,26 12 980,-26-4-1571,8 11 0,1 3 1571,-10-9 787,8 21 0,-1 1-787,-8-14-495,0 13 1,-3 0 494,-1-17-908,-10 11 0,-2-1 908,6-16 1266,-6 7 0,-2 1-1266,-8 3 0,5-11 0,0 0 1514,-9 11-1514,2-13 0,0-3 0,8-3 3276,-22 4-2015,11-9 2015,5-12-2457,-3-4 0,14 2 0,4 3 0</inkml:trace>
+  <inkml:trace contextRef="#ctx0" brushRef="#br0" timeOffset="76848">27256 1571 24575,'-2'31'0,"2"-17"0,1 14 0,1 2 0,1-7 0,2 8 0,1 3 0,1-8 0,0 0 0,-2-4 0,0 0 0,4 6 0,-1-3 0,-3-8 0,7 12 0,-10-21 0,3 5 0,-3-12 0,-3-1 0,0-1 0</inkml:trace>
+  <inkml:trace contextRef="#ctx0" brushRef="#br0" timeOffset="77265">27223 1513 24575,'20'1'0,"0"-1"0,4 2 0,3 3 0,2 3 0,-5 5 0,-2 1 0,0-3 0,-1 1 0,4 8 0,-4 0 0,-11-9 0,0 5 0,-1 4 0,-6 8 0,2-10 0,-1 2 0,-4 4 0,-3 1 0,-1 2 0,0-1-2153,-3 11 2153,2-14 0,-1 0 0,-2-4 0,0-1 0,-4 6 0,-5 6 0,-1 0 0,1-10 0,3-2 0,-1 0 0,0-5 0,0-2 0,-1 0 0,1 0 0,-13 8 0,7-10 0,2-1 0,5-1-820,-20 4 1,24-6 0,-1-3 0</inkml:trace>
+  <inkml:trace contextRef="#ctx0" brushRef="#br0" timeOffset="77998">25316 3360 24575,'27'1'0,"0"0"0,-3-1 0,2 0 0,0 0 0,1 1 0,2-1 0,3 0-547,-5 1 1,4-1 0,1-1 0,2 1 0,0 0 0,-1 0-1,1 1 1,0-1 0,1 1 0,-1-1 0,0 1 0,-1-1 9,2 1 0,-2-1 0,-1 0 1,1 1-1,2 0 537,-2-1 0,3 1 0,1 1 0,0-1 0,-3 0 0,-4 0 0,-8 0 0,14 2 0,-6-1 0,8-1 0,-1 0 0,-11 0 0,-9-1 0,16 0 2488,-30 0-2488,-3 0 0,-4 0 0</inkml:trace>
+  <inkml:trace contextRef="#ctx0" brushRef="#br0" timeOffset="78398">26944 2936 24575,'3'5'0,"5"14"0,0 3 0,3 1-820,-2 2 1,3 9 0,1 1 0,-4-6-820,-3-7 1,1 1 982,1 2 1,3 7-1,0 1 1,0-2 0,-4-7 1907,0 7-1252,2 2 0,3 7 0,-3-10 1730,-2-10-1730,0 11 0,1-3 0,-4-18 0,4 15 3276,-6-19 0,3 6-3202,-4-7 0,1-2 0,-2-2 1</inkml:trace>
+  <inkml:trace contextRef="#ctx0" brushRef="#br0" timeOffset="78703">26908 3039 24575,'5'0'0,"9"0"0,22-10 0,-4 3 0,1-4 0,2-2-1639,-2 2 1,-2 0-1,-8 2 1,0 0 663,11-3 1,-5 4 974,-20 7 0,12-3 0,-20 5 0,-1 1 0</inkml:trace>
+  <inkml:trace contextRef="#ctx0" brushRef="#br0" timeOffset="79150">27003 3398 24575,'12'5'0,"7"-1"0,-13-4 0,7 0 0,-3 0 0,-4 0 0,14-3 0,-10 3-3277,25-9 0,-24 8 1638,11-5 1,-1-1 1299,-13 5 339,12-6 0,-19 9 0,-1-2 0,0 2 0</inkml:trace>
+  <inkml:trace contextRef="#ctx0" brushRef="#br0" timeOffset="79616">27332 3281 24575,'7'19'0,"0"0"0,3 4 0,1-3 0,-3-1 0,4-3 0,0 0 0,-1-2 0,2 2 0,-4-6 0,-7-8 0,0-4 0,-1-21-3277,-2-9 0,0-2 3162,2 9 0,1 1 115,5 2 0,0-5 0,8 11 0,4 10 0,-6 1 0,3 0 0</inkml:trace>
+  <inkml:trace contextRef="#ctx0" brushRef="#br0" timeOffset="80181">27657 3240 24575,'-18'4'0,"4"-1"0,8 4 0,3 8 0,7 14 0,0-5 0,2-5 0,1-1 0,0-7 0,13 9 0,-4-13 0,-2 1 0,2-5 0,-12-5 0,13-4 0,-10 1 0,14-13 0,-14 11 0,7-21 0,-12 20 0,2-21 0,-4 22 0,-7-14 0,-8 10 0,3-1 0,-15 4 0,15 7 0,-2 0 0,7 1 0</inkml:trace>
+  <inkml:trace contextRef="#ctx0" brushRef="#br0" timeOffset="80851">27810 3168 24575,'23'1'0,"-12"0"0,9 1 0,-13 1 0,0 5 0,5 11 0,-6-5 0,4 16 0,-7-14 0,5 2 0,-6-7 0,0-8 0,-2-5 0,2-8 0,-2-3 0,3-15 0,0 6 0,3-6 0,1 13 0,6-2 0,-7 12 0,14-11 0,-12 12 0,5-4 0,-1 11 0,-5 2 0,13 14 0,-7 2 0,2 9 0,-9-12 0,-5 1 0,-1-11 0,3 3 0,-2-3 0,6-2 0,-6-5 0,3 1 0</inkml:trace>
+  <inkml:trace contextRef="#ctx0" brushRef="#br0" timeOffset="81199">28148 3028 24575,'6'5'0,"7"-2"0,6-2 0,1-5 0,-5 1 0,-6-4 0,-8-8 0,1 9 0,-1-6 0</inkml:trace>
+  <inkml:trace contextRef="#ctx0" brushRef="#br0" timeOffset="81468">28218 2866 24575,'6'21'0,"0"-1"0,2 7 0,0-4 0,-4-10 0,3 11 0,-1 0-2945,-2-11 2945,3 22 0,-1-2 0,-1 0 0,1 2 0,-3-10 0,1 3 0,0-5-3277,3 2 1209,-5-10 2068,5-5 0,-3-9 0,10-2 0,-6-2-758,12-8 0,-15 6 1,4-3-1</inkml:trace>
+  <inkml:trace contextRef="#ctx0" brushRef="#br0" timeOffset="81901">28508 3068 24575,'12'-9'0,"-5"2"0,0-10 0,-5 9 0,-7-6 0,3 11 0,-11-8 0,8 10 0,-6-5 0,0 6 0,-4 14 0,3-8 0,3 14 0,2 2 0,5-8-1639,-2 12 1,1 0-1639,2-15 1638,3 9 1,0-1 148,0-12 1490,3 10 0,8-9 0,-8-5 0,20 6 0,-6-10 3276,-5 0-2015,7-6 2015,-19 3-2457,5-5 0,-7 7 0,0-1 0</inkml:trace>
+  <inkml:trace contextRef="#ctx0" brushRef="#br0" timeOffset="82450">28633 3026 24575,'17'0'0,"1"7"0,-8 12 0,-3 5 0,0-4 0,-7-1 0,0-14 0,0-8 0,4-17 0,-1 3 0,1-5 0,0 1 0,0 6-1639,0-4 1,1 0-1639,-1 9 3047,3-8 230,3 14 0,3-3 0,-1 5 0,8 6 0,-14-2 0,14 11 0,-5 5-394,-4-4 394,1 4 3276,-4-2 0,2 5-3240,-1-3-36,1 8 0,-6-20 0,3 7 0,-3-9-3277,11-1 360,-9-2 2323,16-3 0,-18 0 0,6-1 0</inkml:trace>
+  <inkml:trace contextRef="#ctx0" brushRef="#br0" timeOffset="83050">29085 2949 24575,'-5'1'0,"-4"1"0,-3 16 0,2-9 0,1 10 0,1 2 0,4-9 0,-1 8 0,2-1 0,2-11 0,5 13 0,-2-18 0,7 5 0,2-12-3277,13-8 0,-10 3 1992,6-10 1,-1 0 1284,-10 6-1639,6-11 1,-2 0 1153,-8 12-773,-1-13 0,-1 1 1258,-5 13 2516,1-23-2516,-4 12 0,1 2 1564,1 2-1564,-3-8 0,0 1 0,5 16 3276,-6-8-2015,7 18 2015,-3 3 0,4 21-3044,0-15-232,-1 14 0,1 2 0,-1-14 0,-1 21 0,1 2 0,-1-15-1639,-1 14 1,-1 0-1639,2-17 1638,-3 11 1,1-2 148,2-16 1220,-1 10 0,1 0 270,1-12 0,0 11 0,0-16 0,0 1 0</inkml:trace>
+  <inkml:trace contextRef="#ctx0" brushRef="#br0" timeOffset="83571">25476 4337 20438,'32'7'0,"0"0"0,0 0 0,-1 0 0,0 0 0,2 0 0,1 0 0,0 0 0,1 1 0,0 0 0,-2-1 0,0 1 0,0 0 0,1 0 0,0 0 0,-1 0 0,-1-1-547,1 1 1,-1-2 0,-1 0 0,1 1 0,1-1 0,2 1 218,-4-1 0,3 1 0,1 1 1,1-1-1,1 0 0,-1 1 1,0-1-1,-1-1 0,-3-1 1,-2 0 205,8 0 0,-3-2 0,-2 0 0,-1-1 0,2 2 122,-3-1 0,2 2 0,-1-1 0,0 1 0,-2-2 0,-1 0 0,14 1 0,-3-2 0,-14-1 2815,-19-1-2815,-12-10 0,-2 8 0,-10-8 0</inkml:trace>
+  <inkml:trace contextRef="#ctx0" brushRef="#br0" timeOffset="84142">27382 4287 24575,'17'32'0,"-7"-12"0,3 5 0,-2 0 0,-4-7 0,3 4 0,1 0 0,-6-10 0,7 14 0,-7-14 0,5 15 0,-7-15-3277,4 22 0,-5-24 1638,1 14 1,0 1 1298,-1-10 1305,0 8 0,1 1-965,-1 0 0,1 1 0,-1-10 3276,-1-12-490,-1-5-607,-4-11-2179,3 3 0,-5-2 0,6 8 0</inkml:trace>
+  <inkml:trace contextRef="#ctx0" brushRef="#br0" timeOffset="84754">27361 4398 24575,'26'-13'0,"-1"0"0,-7 4 0,2-1 0,9-1 0,6-1 0,2 0 0,-4 1-1093,-3 3 1,-2 0 0,1 1-1,6-3 1,1 1 0,-4 2-547,-3 2 1,-6 3 4050,-11 2-2412,1 5 0,-5 8 0,0-5 1554,-4 22-1554,-19 2-1639,0-10 1,-2-1 856,5-5 0,-1-1 1384,-10 1 1,3-4-603,16-7 0,-12 5 0,20-13 0,1 4 0,20-12 0,-8 7 0,10-1 0,-1 0 0,-10 3 0,20-1 2059,-24 8-2059,-1-2 0,11 19 0,-3 9 0,-1-1 0,-4 5 0,-10-25 0,-10 6 0,-27-4 0,11-1 0,-14-5 0,-1-2 0,9-3 0,-6 0 0,0-2 0,0-1 0,3 0 0,11-3 0,20 3 0,-2 1 0</inkml:trace>
+  <inkml:trace contextRef="#ctx0" brushRef="#br0" timeOffset="85321">28386 4288 24575,'-17'0'0,"9"0"-3277,-20 3 0,21-2 684,-24 7 2593,23-4 1807,-21 13-1807,12 14 0,3-9 0,8-3 0,4-1 0,15 2 0,-6-6 0,10-2 3276,2-12-43,10-3-3233,-5-4 0,1-2 0,7-5 0,-12 1 0,-3 0 0,-10 2 831,3-15-831,-8 7 0,-3 6 0,-3 17 0,1 9 0,0 7 0,8-12 0,21-10 0,-7-1-656,1-4 1,-2-1-1,-9 3 1,2-2 0</inkml:trace>
+  <inkml:trace contextRef="#ctx0" brushRef="#br0" timeOffset="85704">28796 4224 24575,'-26'6'0,"-2"3"0,18-4 0,-2 1 0,4 4 0,9 13 0,1-5 0,10 14 0,1-18 0,2-3 0,7 5 0,-3-6 0,-1-3 0,-2-5 0,9-1 0,-12-1 0,2-4 0,-2-8 0,-9 5 0,15-21 0,-14 19-820,12-17 1,-14 20 0,2-3 0</inkml:trace>
+  <inkml:trace contextRef="#ctx0" brushRef="#br0" timeOffset="86122">29020 3945 24575,'6'18'0,"0"-1"0,2 4 0,-2 0 0,5 13-1639,-4-10 1,-1-3-1639,-4-9 1638,0 12 1,0-1-1639,-2-13 3238,-2 17 1,0 2 38,-1-14-29,-1 9 0,0 0 29,1-10 3276,0-1-2967,16-48-309,-3 8 495,3-6 1,2 0-496,2 5-947,2 0 0,0 2 947,-4 8-327,5-4 0,0 3 327,-10 13 0,12-10 0,-14 14 0,-6 6 0,0-1-195,-5 9 1,3-10 0,-2 4 0</inkml:trace>
+  <inkml:trace contextRef="#ctx0" brushRef="#br0" timeOffset="86353">29155 4171 24575,'10'6'0,"19"4"0,-18-7 0,23 5 0,-7-3 0,-6-1 0,-2 0 0,-15-4 0</inkml:trace>
+  <inkml:trace contextRef="#ctx0" brushRef="#br0" timeOffset="87226">25431 3127 24575,'17'-9'0,"7"-7"0,3-1 0,-10 4 0,2-3 0,-2-2 0,0-3 0,0 2-1192,2 0 1,-1-2 1191,3-8 0,1-4 0,-4 6 0,-1 2 0,-5-2 0,1-6 0,-1 5 0,-3 11 0,0 1 0,2-11 0,0 1-3277,7 2 0,-14 23 4609,12-4-1332,-10 4 0,13-3 0,-14 4 0,3-3 0</inkml:trace>
+  <inkml:trace contextRef="#ctx0" brushRef="#br0" timeOffset="88516">28931 1195 24575,'11'23'0,"-1"-1"0,-1-1 0,0-1 0,-1 0 0,0 1-772,3 7 0,1 5 772,-2-2 0,0 2 0,-1-1-417,-1-7 0,-1-2 1,2 1 416,1 3 0,2 3 0,-1-2 0,-2-6 660,1 3-660,5 2 0,1-2 0,-10-14 0,5 3 733,-10-13-733,-1-13 0,-7-22 0,4 8 0,-3-5 0,5 21 0</inkml:trace>
+  <inkml:trace contextRef="#ctx0" brushRef="#br0" timeOffset="88801">28877 1282 24575,'-27'19'0,"15"-10"-1639,-11 8 1,0 0-1639,13-8 1638,-9 6 1,1-1-1639,12-8 5064,-7 5-1787,13-10 0,2-1 0,-1 0 0</inkml:trace>
+  <inkml:trace contextRef="#ctx0" brushRef="#br0" timeOffset="89534">29841 2749 24575,'6'-10'0,"7"-13"0,-5 13-1639,6-8 1,1 1-1639,-5 8 1641,8-5 1,1 2 1635,-7 9 1540,15-4-1540,-19 7 0,4 13 0,-6 9 0,-3 4 0,0 11 0,-3-10 0,-1 4 0,-4-3 0,-11 0 0,-2-3 0,10-1 0,-3-1 0,-9-2 0,-4-1 0,4-5 0,5-4 0,-7 4 0,-7 4 0,5-3 3276,1-1-1894,-5 3 1,2-1-1383,11-6 1671,6 0-1671,26-15 0,-4 1-1639,8-3 1,-1-2-1296,-11 3 2934,20-4-72,-8 5 1,1 1 71,2 1 0,2 0 0,-1-2 0,1 1 0,4 1 0,-5 1 0,-17 1 0,9 0 0,-16 0 0,-2 0 0</inkml:trace>
+  <inkml:trace contextRef="#ctx0" brushRef="#br0" timeOffset="90251">30086 3701 24575,'-1'-5'0,"0"0"0,7-1 0,15-9 0,-8 7 0,11-4 0,1 1 0,-10 6 0,6-2 0,0 3 0,-6 7 0,-1 8 0,-4 10 0,-8 3 0,-2-2 0,-4 2 0,-10 1 0,-3 0 0,6-3 0,-3 0-1093,-4-5 1,-3 0 0,2-4-2185,-4-3 1638,-4 2 1,0-2 148,14-8 1490,-14 6 0,31-8 0,14 3 0,5 0 0,8-2 0,5 6 0,-1 0 0,-5-2 0,-2 6 0,-3 1 0,-10-4 0,13 10 3276,-28-7-2015,-1 2-1261,0-1 3276,-8 6 0,8-11-6553,-4 9 2,4-11 3275,-4 2 0,-19 1 0,-3-4-656,5-1 1,0-1-1,1-2 1,4 0 0</inkml:trace>
+  <inkml:trace contextRef="#ctx0" brushRef="#br0" timeOffset="91087">29592 4148 24575,'25'-8'0,"0"0"0,-1 1 0,0 1 0,-2-1 0,3-4 0,-4 1 0,-14 6 0,11-7 0,-26-4 0,5 11 0,-7-9 0</inkml:trace>
+  <inkml:trace contextRef="#ctx0" brushRef="#br0" timeOffset="91619">29413 3236 24575,'27'-24'0,"-11"11"0,3-4 0,0 0 0,-5 4 0,-1-3 0,-2 1 0,-5 5 0,5-17 0,-13 17 0,4-2 0,-5 6 0</inkml:trace>
+  <inkml:trace contextRef="#ctx0" brushRef="#br0" timeOffset="92105">28111 2016 24575,'21'-13'0,"1"1"0,6-4 0,-5 2 0,-2-1 0,-3 0 0,8-2 0,-18 8 0</inkml:trace>
+  <inkml:trace contextRef="#ctx0" brushRef="#br0" timeOffset="103435">25719 10679 24575,'16'3'0,"-5"0"0,8 0 0,0 0 0,-7-1 0,7-1 0,1 1 0,-4-2 0,9 1 0,3-1 0,-6 0 0,-1 0 0,15 0 0,-8 0 0,5-2 0,-3 1-983,-3 0 1,2-1 982,2 1 0,5-2 0,2 1 0,-1 0-820,-4 0 1,0 0 0,-1 1 0,-1-1-133,1 0 0,-2 0 0,0 0 952,2 1 0,-1-1 0,-9 1-387,-8-3 387,2 2 0,-6-1 0,-6 2 0,8 1 637,5-1 0,5 0-637,10 1 0,2 0 0,-5 0 0,0 0 0,9 0 0,-5 0 819,-15 0 0,5 0 0,-21 0 0</inkml:trace>
+  <inkml:trace contextRef="#ctx0" brushRef="#br0" timeOffset="110142">30040 10328 24575,'27'-13'0,"-6"-3"0,4-4 0,-1 0 0,1-1 0,2-2-656,-2 1 1,4-5-1,2-1 1,-3 2 0,-5 4-984,-3 4 1,-1-1 982,3-2 1,4-6-1,2-1 1,-3 2 0,-6 6 1228,5-7-573,-2 0 0,5-6 0,-6 7 1822,-4 4-1822,1-10 0,-3 3-457,-10 18 457,4-10 0,0-3 0,-5 4 0,2-2 0,-3 6 0,-2 11 0</inkml:trace>
+</inkml:ink>
+</file>
+
 <file path=ppt/notesMasters/notesMaster1.xml><?xml version="1.0" encoding="utf-8"?>
 <p:notesMaster xmlns:a="http://schemas.openxmlformats.org/drawingml/2006/main" xmlns:r="http://schemas.openxmlformats.org/officeDocument/2006/relationships" xmlns:p="http://schemas.openxmlformats.org/presentationml/2006/main">
   <p:cSld>
@@ -4071,21 +4181,21 @@
           <p:nvPr>
             <p:extLst>
               <p:ext uri="{D42A27DB-BD31-4B8C-83A1-F6EECF244321}">
-                <p14:modId xmlns:p14="http://schemas.microsoft.com/office/powerpoint/2010/main" val="1579011935"/>
+                <p14:modId xmlns:p14="http://schemas.microsoft.com/office/powerpoint/2010/main" val="1652171270"/>
               </p:ext>
             </p:extLst>
           </p:nvPr>
         </p:nvGraphicFramePr>
         <p:xfrm>
-          <a:off x="502920" y="2103120"/>
-          <a:ext cx="7680960" cy="3291840"/>
+          <a:off x="519289" y="2103120"/>
+          <a:ext cx="7664591" cy="3291840"/>
         </p:xfrm>
         <a:graphic>
           <a:graphicData uri="http://schemas.openxmlformats.org/drawingml/2006/table">
             <a:tbl>
               <a:tblPr/>
               <a:tblGrid>
-                <a:gridCol w="2377440">
+                <a:gridCol w="2361071">
                   <a:extLst>
                     <a:ext uri="{9D8B030D-6E8A-4147-A177-3AD203B41FA5}">
                       <a16:colId xmlns:a16="http://schemas.microsoft.com/office/drawing/2014/main" val="20000"/>
@@ -16115,7 +16225,7 @@
         </p:nvGraphicFramePr>
         <p:xfrm>
           <a:off x="6812280" y="3657600"/>
-          <a:ext cx="4873752" cy="914400"/>
+          <a:ext cx="4873752" cy="1920240"/>
         </p:xfrm>
         <a:graphic>
           <a:graphicData uri="http://schemas.openxmlformats.org/drawingml/2006/table">
@@ -17481,21 +17591,21 @@
           <p:nvPr>
             <p:extLst>
               <p:ext uri="{D42A27DB-BD31-4B8C-83A1-F6EECF244321}">
-                <p14:modId xmlns:p14="http://schemas.microsoft.com/office/powerpoint/2010/main" val="1579011935"/>
+                <p14:modId xmlns:p14="http://schemas.microsoft.com/office/powerpoint/2010/main" val="1614044413"/>
               </p:ext>
             </p:extLst>
           </p:nvPr>
         </p:nvGraphicFramePr>
         <p:xfrm>
-          <a:off x="6446520" y="2103120"/>
-          <a:ext cx="5239512" cy="914400"/>
+          <a:off x="6441057" y="2103120"/>
+          <a:ext cx="5244975" cy="2286000"/>
         </p:xfrm>
         <a:graphic>
           <a:graphicData uri="http://schemas.openxmlformats.org/drawingml/2006/table">
             <a:tbl>
               <a:tblPr/>
               <a:tblGrid>
-                <a:gridCol w="2286000">
+                <a:gridCol w="2291463">
                   <a:extLst>
                     <a:ext uri="{9D8B030D-6E8A-4147-A177-3AD203B41FA5}">
                       <a16:colId xmlns:a16="http://schemas.microsoft.com/office/drawing/2014/main" val="20000"/>
@@ -20924,7 +21034,7 @@
         </p:nvGraphicFramePr>
         <p:xfrm>
           <a:off x="502920" y="2103120"/>
-          <a:ext cx="11183112" cy="914400"/>
+          <a:ext cx="11183112" cy="2743200"/>
         </p:xfrm>
         <a:graphic>
           <a:graphicData uri="http://schemas.openxmlformats.org/drawingml/2006/table">
@@ -24653,7 +24763,7 @@
         </p:nvGraphicFramePr>
         <p:xfrm>
           <a:off x="502920" y="2103120"/>
-          <a:ext cx="11183112" cy="914400"/>
+          <a:ext cx="11183112" cy="4114800"/>
         </p:xfrm>
         <a:graphic>
           <a:graphicData uri="http://schemas.openxmlformats.org/drawingml/2006/table">
@@ -32442,6 +32552,57 @@
           </p:pic>
         </mc:Fallback>
       </mc:AlternateContent>
+      <mc:AlternateContent xmlns:mc="http://schemas.openxmlformats.org/markup-compatibility/2006">
+        <mc:Choice xmlns:p14="http://schemas.microsoft.com/office/powerpoint/2010/main" Requires="p14">
+          <p:contentPart p14:bwMode="auto" r:id="rId5">
+            <p14:nvContentPartPr>
+              <p14:cNvPr id="17" name="Ink 16">
+                <a:extLst>
+                  <a:ext uri="{FF2B5EF4-FFF2-40B4-BE49-F238E27FC236}">
+                    <a16:creationId xmlns:a16="http://schemas.microsoft.com/office/drawing/2014/main" id="{B3517906-6722-F626-D827-FAF20C10AC8D}"/>
+                  </a:ext>
+                </a:extLst>
+              </p14:cNvPr>
+              <p14:cNvContentPartPr/>
+              <p14:nvPr/>
+            </p14:nvContentPartPr>
+            <p14:xfrm>
+              <a:off x="9218160" y="4843080"/>
+              <a:ext cx="255600" cy="131400"/>
+            </p14:xfrm>
+          </p:contentPart>
+        </mc:Choice>
+        <mc:Fallback>
+          <p:pic>
+            <p:nvPicPr>
+              <p:cNvPr id="17" name="Ink 16">
+                <a:extLst>
+                  <a:ext uri="{FF2B5EF4-FFF2-40B4-BE49-F238E27FC236}">
+                    <a16:creationId xmlns:a16="http://schemas.microsoft.com/office/drawing/2014/main" id="{B3517906-6722-F626-D827-FAF20C10AC8D}"/>
+                  </a:ext>
+                </a:extLst>
+              </p:cNvPr>
+              <p:cNvPicPr/>
+              <p:nvPr/>
+            </p:nvPicPr>
+            <p:blipFill>
+              <a:blip r:embed="rId6"/>
+              <a:stretch>
+                <a:fillRect/>
+              </a:stretch>
+            </p:blipFill>
+            <p:spPr>
+              <a:xfrm>
+                <a:off x="9208800" y="4833720"/>
+                <a:ext cx="274320" cy="150120"/>
+              </a:xfrm>
+              <a:prstGeom prst="rect">
+                <a:avLst/>
+              </a:prstGeom>
+            </p:spPr>
+          </p:pic>
+        </mc:Fallback>
+      </mc:AlternateContent>
     </p:spTree>
   </p:cSld>
   <p:clrMapOvr>
@@ -33955,6 +34116,57 @@
           </a:p>
         </p:txBody>
       </p:sp>
+      <mc:AlternateContent xmlns:mc="http://schemas.openxmlformats.org/markup-compatibility/2006">
+        <mc:Choice xmlns:p14="http://schemas.microsoft.com/office/powerpoint/2010/main" Requires="p14">
+          <p:contentPart p14:bwMode="auto" r:id="rId3">
+            <p14:nvContentPartPr>
+              <p14:cNvPr id="24" name="Ink 23">
+                <a:extLst>
+                  <a:ext uri="{FF2B5EF4-FFF2-40B4-BE49-F238E27FC236}">
+                    <a16:creationId xmlns:a16="http://schemas.microsoft.com/office/drawing/2014/main" id="{345A6123-6DA8-37B3-EDCC-6FFE6EC3CAAB}"/>
+                  </a:ext>
+                </a:extLst>
+              </p14:cNvPr>
+              <p14:cNvContentPartPr/>
+              <p14:nvPr/>
+            </p14:nvContentPartPr>
+            <p14:xfrm>
+              <a:off x="1365840" y="430200"/>
+              <a:ext cx="9673920" cy="3654360"/>
+            </p14:xfrm>
+          </p:contentPart>
+        </mc:Choice>
+        <mc:Fallback>
+          <p:pic>
+            <p:nvPicPr>
+              <p:cNvPr id="24" name="Ink 23">
+                <a:extLst>
+                  <a:ext uri="{FF2B5EF4-FFF2-40B4-BE49-F238E27FC236}">
+                    <a16:creationId xmlns:a16="http://schemas.microsoft.com/office/drawing/2014/main" id="{345A6123-6DA8-37B3-EDCC-6FFE6EC3CAAB}"/>
+                  </a:ext>
+                </a:extLst>
+              </p:cNvPr>
+              <p:cNvPicPr/>
+              <p:nvPr/>
+            </p:nvPicPr>
+            <p:blipFill>
+              <a:blip r:embed="rId4"/>
+              <a:stretch>
+                <a:fillRect/>
+              </a:stretch>
+            </p:blipFill>
+            <p:spPr>
+              <a:xfrm>
+                <a:off x="1356480" y="420840"/>
+                <a:ext cx="9692640" cy="3673080"/>
+              </a:xfrm>
+              <a:prstGeom prst="rect">
+                <a:avLst/>
+              </a:prstGeom>
+            </p:spPr>
+          </p:pic>
+        </mc:Fallback>
+      </mc:AlternateContent>
     </p:spTree>
   </p:cSld>
   <p:clrMapOvr>
